--- a/app/templates/colegio_de_profesores_del_peru/plantilla_curso.pptx
+++ b/app/templates/colegio_de_profesores_del_peru/plantilla_curso.pptx
@@ -3522,7 +3522,15 @@
                 <a:ea typeface="Times New Roman" panose="02020603050405020304" pitchFamily="18" charset="0"/>
                 <a:cs typeface="Simplified Arabic" panose="02020603050405020304" pitchFamily="18" charset="-78"/>
               </a:rPr>
-              <a:t>{{TEMA_DIPLOMAD}}</a:t>
+              <a:t>{{TEMA</a:t>
+            </a:r>
+            <a:r>
+              <a:rPr lang="es-ES" sz="2800">
+                <a:latin typeface="Britannic Bold" panose="020B0903060703020204" pitchFamily="34" charset="0"/>
+                <a:ea typeface="Times New Roman" panose="02020603050405020304" pitchFamily="18" charset="0"/>
+                <a:cs typeface="Simplified Arabic" panose="02020603050405020304" pitchFamily="18" charset="-78"/>
+              </a:rPr>
+              <a:t>_DIPLOMADO}}</a:t>
             </a:r>
             <a:r>
               <a:rPr lang="es-PE" sz="2800" dirty="0">

--- a/app/templates/colegio_de_profesores_del_peru/plantilla_curso.pptx
+++ b/app/templates/colegio_de_profesores_del_peru/plantilla_curso.pptx
@@ -3511,33 +3511,14 @@
           <a:p>
             <a:pPr algn="ctr"/>
             <a:r>
-              <a:rPr lang="es-PE" sz="2800" dirty="0">
+              <a:rPr lang="es-PE" sz="2800">
                 <a:latin typeface="Britannic Bold" panose="020B0903060703020204" pitchFamily="34" charset="0"/>
               </a:rPr>
-              <a:t>“</a:t>
-            </a:r>
-            <a:r>
-              <a:rPr lang="es-ES" sz="2800" dirty="0">
-                <a:latin typeface="Britannic Bold" panose="020B0903060703020204" pitchFamily="34" charset="0"/>
-                <a:ea typeface="Times New Roman" panose="02020603050405020304" pitchFamily="18" charset="0"/>
-                <a:cs typeface="Simplified Arabic" panose="02020603050405020304" pitchFamily="18" charset="-78"/>
-              </a:rPr>
-              <a:t>{{TEMA</a:t>
-            </a:r>
-            <a:r>
-              <a:rPr lang="es-ES" sz="2800">
-                <a:latin typeface="Britannic Bold" panose="020B0903060703020204" pitchFamily="34" charset="0"/>
-                <a:ea typeface="Times New Roman" panose="02020603050405020304" pitchFamily="18" charset="0"/>
-                <a:cs typeface="Simplified Arabic" panose="02020603050405020304" pitchFamily="18" charset="-78"/>
-              </a:rPr>
-              <a:t>_DIPLOMADO}}</a:t>
-            </a:r>
-            <a:r>
-              <a:rPr lang="es-PE" sz="2800" dirty="0">
-                <a:latin typeface="Britannic Bold" panose="020B0903060703020204" pitchFamily="34" charset="0"/>
-              </a:rPr>
-              <a:t>”</a:t>
-            </a:r>
+              <a:t>“{{TEMA_DIPLOMADO}}”</a:t>
+            </a:r>
+            <a:endParaRPr lang="es-PE" sz="2800" dirty="0">
+              <a:latin typeface="Britannic Bold" panose="020B0903060703020204" pitchFamily="34" charset="0"/>
+            </a:endParaRPr>
           </a:p>
           <a:p>
             <a:pPr algn="ctr"/>
